--- a/analyzer.pptx
+++ b/analyzer.pptx
@@ -39,6 +39,7 @@
     <p:sldId id="267" r:id="rId33"/>
     <p:sldId id="268" r:id="rId34"/>
     <p:sldId id="290" r:id="rId35"/>
+    <p:sldId id="291" r:id="rId36"/>
   </p:sldIdLst>
   <p:sldSz cx="12192000" cy="6858000"/>
   <p:notesSz cx="6858000" cy="9144000"/>
@@ -292,7 +293,7 @@
           <a:p>
             <a:fld id="{C58B34C6-E232-49A8-82BD-EBE327C00AFB}" type="datetimeFigureOut">
               <a:rPr lang="pl-PL" smtClean="0"/>
-              <a:t>29.07.2025</a:t>
+              <a:t>12.08.2025</a:t>
             </a:fld>
             <a:endParaRPr lang="pl-PL" dirty="0"/>
           </a:p>
@@ -490,7 +491,7 @@
           <a:p>
             <a:fld id="{C58B34C6-E232-49A8-82BD-EBE327C00AFB}" type="datetimeFigureOut">
               <a:rPr lang="pl-PL" smtClean="0"/>
-              <a:t>29.07.2025</a:t>
+              <a:t>12.08.2025</a:t>
             </a:fld>
             <a:endParaRPr lang="pl-PL" dirty="0"/>
           </a:p>
@@ -698,7 +699,7 @@
           <a:p>
             <a:fld id="{C58B34C6-E232-49A8-82BD-EBE327C00AFB}" type="datetimeFigureOut">
               <a:rPr lang="pl-PL" smtClean="0"/>
-              <a:t>29.07.2025</a:t>
+              <a:t>12.08.2025</a:t>
             </a:fld>
             <a:endParaRPr lang="pl-PL" dirty="0"/>
           </a:p>
@@ -896,7 +897,7 @@
           <a:p>
             <a:fld id="{C58B34C6-E232-49A8-82BD-EBE327C00AFB}" type="datetimeFigureOut">
               <a:rPr lang="pl-PL" smtClean="0"/>
-              <a:t>29.07.2025</a:t>
+              <a:t>12.08.2025</a:t>
             </a:fld>
             <a:endParaRPr lang="pl-PL" dirty="0"/>
           </a:p>
@@ -1171,7 +1172,7 @@
           <a:p>
             <a:fld id="{C58B34C6-E232-49A8-82BD-EBE327C00AFB}" type="datetimeFigureOut">
               <a:rPr lang="pl-PL" smtClean="0"/>
-              <a:t>29.07.2025</a:t>
+              <a:t>12.08.2025</a:t>
             </a:fld>
             <a:endParaRPr lang="pl-PL" dirty="0"/>
           </a:p>
@@ -1436,7 +1437,7 @@
           <a:p>
             <a:fld id="{C58B34C6-E232-49A8-82BD-EBE327C00AFB}" type="datetimeFigureOut">
               <a:rPr lang="pl-PL" smtClean="0"/>
-              <a:t>29.07.2025</a:t>
+              <a:t>12.08.2025</a:t>
             </a:fld>
             <a:endParaRPr lang="pl-PL" dirty="0"/>
           </a:p>
@@ -1848,7 +1849,7 @@
           <a:p>
             <a:fld id="{C58B34C6-E232-49A8-82BD-EBE327C00AFB}" type="datetimeFigureOut">
               <a:rPr lang="pl-PL" smtClean="0"/>
-              <a:t>29.07.2025</a:t>
+              <a:t>12.08.2025</a:t>
             </a:fld>
             <a:endParaRPr lang="pl-PL" dirty="0"/>
           </a:p>
@@ -1989,7 +1990,7 @@
           <a:p>
             <a:fld id="{C58B34C6-E232-49A8-82BD-EBE327C00AFB}" type="datetimeFigureOut">
               <a:rPr lang="pl-PL" smtClean="0"/>
-              <a:t>29.07.2025</a:t>
+              <a:t>12.08.2025</a:t>
             </a:fld>
             <a:endParaRPr lang="pl-PL" dirty="0"/>
           </a:p>
@@ -2102,7 +2103,7 @@
           <a:p>
             <a:fld id="{C58B34C6-E232-49A8-82BD-EBE327C00AFB}" type="datetimeFigureOut">
               <a:rPr lang="pl-PL" smtClean="0"/>
-              <a:t>29.07.2025</a:t>
+              <a:t>12.08.2025</a:t>
             </a:fld>
             <a:endParaRPr lang="pl-PL" dirty="0"/>
           </a:p>
@@ -2413,7 +2414,7 @@
           <a:p>
             <a:fld id="{C58B34C6-E232-49A8-82BD-EBE327C00AFB}" type="datetimeFigureOut">
               <a:rPr lang="pl-PL" smtClean="0"/>
-              <a:t>29.07.2025</a:t>
+              <a:t>12.08.2025</a:t>
             </a:fld>
             <a:endParaRPr lang="pl-PL" dirty="0"/>
           </a:p>
@@ -2701,7 +2702,7 @@
           <a:p>
             <a:fld id="{C58B34C6-E232-49A8-82BD-EBE327C00AFB}" type="datetimeFigureOut">
               <a:rPr lang="pl-PL" smtClean="0"/>
-              <a:t>29.07.2025</a:t>
+              <a:t>12.08.2025</a:t>
             </a:fld>
             <a:endParaRPr lang="pl-PL" dirty="0"/>
           </a:p>
@@ -2942,7 +2943,7 @@
           <a:p>
             <a:fld id="{C58B34C6-E232-49A8-82BD-EBE327C00AFB}" type="datetimeFigureOut">
               <a:rPr lang="pl-PL" smtClean="0"/>
-              <a:t>29.07.2025</a:t>
+              <a:t>12.08.2025</a:t>
             </a:fld>
             <a:endParaRPr lang="pl-PL" dirty="0"/>
           </a:p>
@@ -21121,6 +21122,1097 @@
 </p:sld>
 </file>
 
+<file path=ppt/slides/slide35.xml><?xml version="1.0" encoding="utf-8"?>
+<p:sld xmlns:a="http://schemas.openxmlformats.org/drawingml/2006/main" xmlns:r="http://schemas.openxmlformats.org/officeDocument/2006/relationships" xmlns:p="http://schemas.openxmlformats.org/presentationml/2006/main">
+  <p:cSld>
+    <p:spTree>
+      <p:nvGrpSpPr>
+        <p:cNvPr id="1" name=""/>
+        <p:cNvGrpSpPr/>
+        <p:nvPr/>
+      </p:nvGrpSpPr>
+      <p:grpSpPr>
+        <a:xfrm>
+          <a:off x="0" y="0"/>
+          <a:ext cx="0" cy="0"/>
+          <a:chOff x="0" y="0"/>
+          <a:chExt cx="0" cy="0"/>
+        </a:xfrm>
+      </p:grpSpPr>
+      <p:sp>
+        <p:nvSpPr>
+          <p:cNvPr id="4" name="Symbol zastępczy zawartości 3">
+            <a:extLst>
+              <a:ext uri="{FF2B5EF4-FFF2-40B4-BE49-F238E27FC236}">
+                <a16:creationId xmlns:a16="http://schemas.microsoft.com/office/drawing/2014/main" id="{10FB72D7-D393-4C01-9126-1CD9DB63A24E}"/>
+              </a:ext>
+            </a:extLst>
+          </p:cNvPr>
+          <p:cNvSpPr>
+            <a:spLocks noGrp="1"/>
+          </p:cNvSpPr>
+          <p:nvPr>
+            <p:ph idx="1"/>
+          </p:nvPr>
+        </p:nvSpPr>
+        <p:spPr>
+          <a:xfrm>
+            <a:off x="838200" y="232747"/>
+            <a:ext cx="10515600" cy="5909926"/>
+          </a:xfrm>
+        </p:spPr>
+        <p:txBody>
+          <a:bodyPr>
+            <a:normAutofit/>
+          </a:bodyPr>
+          <a:lstStyle/>
+          <a:p>
+            <a:pPr marL="0" indent="0">
+              <a:buNone/>
+            </a:pPr>
+            <a:r>
+              <a:rPr lang="pl-PL" sz="2000" dirty="0"/>
+              <a:t>Przekladnia_2uszk</a:t>
+            </a:r>
+            <a:endParaRPr lang="pl-PL" sz="1400" dirty="0"/>
+          </a:p>
+          <a:p>
+            <a:pPr marL="0" indent="0">
+              <a:buNone/>
+            </a:pPr>
+            <a:endParaRPr lang="pl-PL" sz="1400" dirty="0"/>
+          </a:p>
+          <a:p>
+            <a:pPr marL="0" indent="0">
+              <a:buNone/>
+            </a:pPr>
+            <a:r>
+              <a:rPr lang="pl-PL" sz="2000" dirty="0"/>
+              <a:t>The </a:t>
+            </a:r>
+            <a:r>
+              <a:rPr lang="pl-PL" sz="2000" dirty="0" err="1"/>
+              <a:t>objective</a:t>
+            </a:r>
+            <a:r>
+              <a:rPr lang="pl-PL" sz="2000" dirty="0"/>
+              <a:t> </a:t>
+            </a:r>
+            <a:r>
+              <a:rPr lang="pl-PL" sz="2000" dirty="0" err="1"/>
+              <a:t>is</a:t>
+            </a:r>
+            <a:r>
+              <a:rPr lang="pl-PL" sz="2000" dirty="0"/>
+              <a:t> to </a:t>
+            </a:r>
+            <a:r>
+              <a:rPr lang="pl-PL" sz="2000" dirty="0" err="1"/>
+              <a:t>extract</a:t>
+            </a:r>
+            <a:r>
+              <a:rPr lang="pl-PL" sz="2000" dirty="0"/>
+              <a:t> the </a:t>
+            </a:r>
+            <a:r>
+              <a:rPr lang="pl-PL" sz="2000" dirty="0" err="1"/>
+              <a:t>cyclic</a:t>
+            </a:r>
+            <a:r>
+              <a:rPr lang="pl-PL" sz="2000" dirty="0"/>
+              <a:t> </a:t>
+            </a:r>
+            <a:r>
+              <a:rPr lang="pl-PL" sz="2000" dirty="0" err="1"/>
+              <a:t>impulsive</a:t>
+            </a:r>
+            <a:r>
+              <a:rPr lang="pl-PL" sz="2000" dirty="0"/>
+              <a:t> component </a:t>
+            </a:r>
+            <a:r>
+              <a:rPr lang="pl-PL" sz="2000" dirty="0" err="1"/>
+              <a:t>indicating</a:t>
+            </a:r>
+            <a:r>
+              <a:rPr lang="pl-PL" sz="2000" dirty="0"/>
+              <a:t> the </a:t>
+            </a:r>
+            <a:r>
+              <a:rPr lang="pl-PL" sz="2000" dirty="0" err="1"/>
+              <a:t>presence</a:t>
+            </a:r>
+            <a:r>
+              <a:rPr lang="pl-PL" sz="2000" dirty="0"/>
+              <a:t> of a </a:t>
+            </a:r>
+            <a:r>
+              <a:rPr lang="pl-PL" sz="2000" dirty="0" err="1"/>
+              <a:t>local</a:t>
+            </a:r>
+            <a:r>
+              <a:rPr lang="pl-PL" sz="2000" dirty="0"/>
+              <a:t> </a:t>
+            </a:r>
+            <a:r>
+              <a:rPr lang="pl-PL" sz="2000" dirty="0" err="1"/>
+              <a:t>damage</a:t>
+            </a:r>
+            <a:r>
+              <a:rPr lang="pl-PL" sz="2000" dirty="0"/>
+              <a:t> of the </a:t>
+            </a:r>
+            <a:r>
+              <a:rPr lang="pl-PL" sz="2000" dirty="0" err="1"/>
+              <a:t>gear</a:t>
+            </a:r>
+            <a:r>
+              <a:rPr lang="pl-PL" sz="2000" dirty="0"/>
+              <a:t> </a:t>
+            </a:r>
+            <a:r>
+              <a:rPr lang="pl-PL" sz="2000" dirty="0" err="1"/>
+              <a:t>wheel</a:t>
+            </a:r>
+            <a:r>
+              <a:rPr lang="pl-PL" sz="2000" dirty="0"/>
+              <a:t> in </a:t>
+            </a:r>
+            <a:r>
+              <a:rPr lang="pl-PL" sz="2000" dirty="0" err="1"/>
+              <a:t>an</a:t>
+            </a:r>
+            <a:r>
+              <a:rPr lang="pl-PL" sz="2000" dirty="0"/>
+              <a:t> </a:t>
+            </a:r>
+            <a:r>
+              <a:rPr lang="pl-PL" sz="2000" dirty="0" err="1"/>
+              <a:t>industrial</a:t>
+            </a:r>
+            <a:r>
+              <a:rPr lang="pl-PL" sz="2000" dirty="0"/>
+              <a:t> </a:t>
+            </a:r>
+            <a:r>
+              <a:rPr lang="pl-PL" sz="2000" dirty="0" err="1"/>
+              <a:t>gearbox</a:t>
+            </a:r>
+            <a:r>
+              <a:rPr lang="pl-PL" sz="2000" dirty="0"/>
+              <a:t>, </a:t>
+            </a:r>
+            <a:r>
+              <a:rPr lang="pl-PL" sz="2000" dirty="0" err="1"/>
+              <a:t>or</a:t>
+            </a:r>
+            <a:r>
+              <a:rPr lang="pl-PL" sz="2000" dirty="0"/>
+              <a:t> </a:t>
+            </a:r>
+            <a:r>
+              <a:rPr lang="pl-PL" sz="2000" dirty="0" err="1"/>
+              <a:t>at</a:t>
+            </a:r>
+            <a:r>
+              <a:rPr lang="pl-PL" sz="2000" dirty="0"/>
+              <a:t> </a:t>
+            </a:r>
+            <a:r>
+              <a:rPr lang="pl-PL" sz="2000" dirty="0" err="1"/>
+              <a:t>least</a:t>
+            </a:r>
+            <a:r>
+              <a:rPr lang="pl-PL" sz="2000" dirty="0"/>
+              <a:t> </a:t>
+            </a:r>
+            <a:r>
+              <a:rPr lang="pl-PL" sz="2000" dirty="0" err="1"/>
+              <a:t>confirm</a:t>
+            </a:r>
+            <a:r>
+              <a:rPr lang="pl-PL" sz="2000" dirty="0"/>
+              <a:t> </a:t>
+            </a:r>
+            <a:r>
+              <a:rPr lang="pl-PL" sz="2000" dirty="0" err="1"/>
+              <a:t>its</a:t>
+            </a:r>
+            <a:r>
+              <a:rPr lang="pl-PL" sz="2000" dirty="0"/>
+              <a:t> </a:t>
+            </a:r>
+            <a:r>
+              <a:rPr lang="pl-PL" sz="2000" dirty="0" err="1"/>
+              <a:t>presence</a:t>
+            </a:r>
+            <a:r>
+              <a:rPr lang="pl-PL" sz="2000" dirty="0"/>
+              <a:t> by </a:t>
+            </a:r>
+            <a:r>
+              <a:rPr lang="pl-PL" sz="2000" dirty="0" err="1"/>
+              <a:t>clear</a:t>
+            </a:r>
+            <a:r>
+              <a:rPr lang="pl-PL" sz="2000" dirty="0"/>
+              <a:t> </a:t>
+            </a:r>
+            <a:r>
+              <a:rPr lang="pl-PL" sz="2000" dirty="0" err="1"/>
+              <a:t>visualization</a:t>
+            </a:r>
+            <a:r>
+              <a:rPr lang="pl-PL" sz="2000" dirty="0"/>
+              <a:t> of </a:t>
+            </a:r>
+            <a:r>
+              <a:rPr lang="pl-PL" sz="2000" dirty="0" err="1"/>
+              <a:t>relevant</a:t>
+            </a:r>
+            <a:r>
+              <a:rPr lang="pl-PL" sz="2000" dirty="0"/>
+              <a:t> </a:t>
+            </a:r>
+            <a:r>
+              <a:rPr lang="pl-PL" sz="2000" dirty="0" err="1"/>
+              <a:t>plots</a:t>
+            </a:r>
+            <a:r>
+              <a:rPr lang="pl-PL" sz="2000" dirty="0"/>
+              <a:t>. </a:t>
+            </a:r>
+            <a:r>
+              <a:rPr lang="pl-PL" sz="2000" dirty="0" err="1"/>
+              <a:t>Two</a:t>
+            </a:r>
+            <a:r>
+              <a:rPr lang="pl-PL" sz="2000" dirty="0"/>
+              <a:t> </a:t>
+            </a:r>
+            <a:r>
+              <a:rPr lang="pl-PL" sz="2000" dirty="0" err="1"/>
+              <a:t>such</a:t>
+            </a:r>
+            <a:r>
+              <a:rPr lang="pl-PL" sz="2000" dirty="0"/>
+              <a:t> </a:t>
+            </a:r>
+            <a:r>
+              <a:rPr lang="pl-PL" sz="2000" dirty="0" err="1"/>
+              <a:t>components</a:t>
+            </a:r>
+            <a:r>
+              <a:rPr lang="pl-PL" sz="2000" dirty="0"/>
+              <a:t> </a:t>
+            </a:r>
+            <a:r>
+              <a:rPr lang="pl-PL" sz="2000" dirty="0" err="1"/>
+              <a:t>might</a:t>
+            </a:r>
+            <a:r>
+              <a:rPr lang="pl-PL" sz="2000" dirty="0"/>
+              <a:t> be </a:t>
+            </a:r>
+            <a:r>
+              <a:rPr lang="pl-PL" sz="2000" dirty="0" err="1"/>
+              <a:t>present</a:t>
+            </a:r>
+            <a:r>
+              <a:rPr lang="pl-PL" sz="2000" dirty="0"/>
+              <a:t>, </a:t>
+            </a:r>
+            <a:r>
+              <a:rPr lang="pl-PL" sz="2000" dirty="0" err="1"/>
+              <a:t>related</a:t>
+            </a:r>
+            <a:r>
+              <a:rPr lang="pl-PL" sz="2000" dirty="0"/>
+              <a:t> to </a:t>
+            </a:r>
+            <a:r>
+              <a:rPr lang="pl-PL" sz="2000" dirty="0" err="1"/>
+              <a:t>two</a:t>
+            </a:r>
+            <a:r>
+              <a:rPr lang="pl-PL" sz="2000" dirty="0"/>
+              <a:t> </a:t>
+            </a:r>
+            <a:r>
+              <a:rPr lang="pl-PL" sz="2000" dirty="0" err="1"/>
+              <a:t>local</a:t>
+            </a:r>
+            <a:r>
+              <a:rPr lang="pl-PL" sz="2000" dirty="0"/>
+              <a:t> </a:t>
+            </a:r>
+            <a:r>
+              <a:rPr lang="pl-PL" sz="2000" dirty="0" err="1"/>
+              <a:t>faults</a:t>
+            </a:r>
+            <a:r>
+              <a:rPr lang="pl-PL" sz="2000" dirty="0"/>
+              <a:t> </a:t>
+            </a:r>
+            <a:r>
+              <a:rPr lang="pl-PL" sz="2000" dirty="0" err="1"/>
+              <a:t>occurring</a:t>
+            </a:r>
+            <a:r>
+              <a:rPr lang="pl-PL" sz="2000" dirty="0"/>
+              <a:t> in </a:t>
+            </a:r>
+            <a:r>
+              <a:rPr lang="pl-PL" sz="2000" dirty="0" err="1"/>
+              <a:t>two</a:t>
+            </a:r>
+            <a:r>
+              <a:rPr lang="pl-PL" sz="2000" dirty="0"/>
+              <a:t> </a:t>
+            </a:r>
+            <a:r>
+              <a:rPr lang="pl-PL" sz="2000" dirty="0" err="1"/>
+              <a:t>different</a:t>
+            </a:r>
+            <a:r>
+              <a:rPr lang="pl-PL" sz="2000" dirty="0"/>
+              <a:t> </a:t>
+            </a:r>
+            <a:r>
+              <a:rPr lang="pl-PL" sz="2000" dirty="0" err="1"/>
+              <a:t>wheels</a:t>
+            </a:r>
+            <a:r>
+              <a:rPr lang="pl-PL" sz="2000" dirty="0"/>
+              <a:t> in the same </a:t>
+            </a:r>
+            <a:r>
+              <a:rPr lang="pl-PL" sz="2000" dirty="0" err="1"/>
+              <a:t>gearbox</a:t>
+            </a:r>
+            <a:r>
+              <a:rPr lang="pl-PL" sz="2000" dirty="0"/>
+              <a:t>. </a:t>
+            </a:r>
+            <a:r>
+              <a:rPr lang="pl-PL" sz="2000" dirty="0" err="1"/>
+              <a:t>They</a:t>
+            </a:r>
+            <a:r>
+              <a:rPr lang="pl-PL" sz="2000" dirty="0"/>
+              <a:t> </a:t>
+            </a:r>
+            <a:r>
+              <a:rPr lang="pl-PL" sz="2000" dirty="0" err="1"/>
+              <a:t>will</a:t>
+            </a:r>
+            <a:r>
+              <a:rPr lang="pl-PL" sz="2000" dirty="0"/>
+              <a:t> </a:t>
+            </a:r>
+            <a:r>
+              <a:rPr lang="pl-PL" sz="2000" dirty="0" err="1"/>
+              <a:t>occupy</a:t>
+            </a:r>
+            <a:r>
+              <a:rPr lang="pl-PL" sz="2000" dirty="0"/>
+              <a:t> </a:t>
+            </a:r>
+            <a:r>
+              <a:rPr lang="pl-PL" sz="2000" dirty="0" err="1"/>
+              <a:t>different</a:t>
+            </a:r>
+            <a:r>
+              <a:rPr lang="pl-PL" sz="2000" dirty="0"/>
+              <a:t> </a:t>
+            </a:r>
+            <a:r>
+              <a:rPr lang="pl-PL" sz="2000" dirty="0" err="1"/>
+              <a:t>carrier</a:t>
+            </a:r>
+            <a:r>
+              <a:rPr lang="pl-PL" sz="2000" dirty="0"/>
+              <a:t> </a:t>
+            </a:r>
+            <a:r>
+              <a:rPr lang="pl-PL" sz="2000" dirty="0" err="1"/>
+              <a:t>frequency</a:t>
+            </a:r>
+            <a:r>
+              <a:rPr lang="pl-PL" sz="2000" dirty="0"/>
+              <a:t> </a:t>
+            </a:r>
+            <a:r>
+              <a:rPr lang="pl-PL" sz="2000" dirty="0" err="1"/>
+              <a:t>bands</a:t>
+            </a:r>
+            <a:r>
+              <a:rPr lang="pl-PL" sz="2000" dirty="0"/>
+              <a:t>, but </a:t>
+            </a:r>
+            <a:r>
+              <a:rPr lang="pl-PL" sz="2000" dirty="0" err="1"/>
+              <a:t>will</a:t>
+            </a:r>
+            <a:r>
+              <a:rPr lang="pl-PL" sz="2000" dirty="0"/>
+              <a:t> </a:t>
+            </a:r>
+            <a:r>
+              <a:rPr lang="pl-PL" sz="2000" dirty="0" err="1"/>
+              <a:t>have</a:t>
+            </a:r>
+            <a:r>
+              <a:rPr lang="pl-PL" sz="2000" dirty="0"/>
+              <a:t> </a:t>
+            </a:r>
+            <a:r>
+              <a:rPr lang="pl-PL" sz="2000" dirty="0" err="1"/>
+              <a:t>different</a:t>
+            </a:r>
+            <a:r>
+              <a:rPr lang="pl-PL" sz="2000" dirty="0"/>
+              <a:t> </a:t>
+            </a:r>
+            <a:r>
+              <a:rPr lang="pl-PL" sz="2000" dirty="0" err="1"/>
+              <a:t>modulation</a:t>
+            </a:r>
+            <a:r>
+              <a:rPr lang="pl-PL" sz="2000" dirty="0"/>
+              <a:t> </a:t>
+            </a:r>
+            <a:r>
+              <a:rPr lang="pl-PL" sz="2000" dirty="0" err="1"/>
+              <a:t>frequencies</a:t>
+            </a:r>
+            <a:r>
+              <a:rPr lang="pl-PL" sz="2000" dirty="0"/>
+              <a:t>. The </a:t>
+            </a:r>
+            <a:r>
+              <a:rPr lang="pl-PL" sz="2000" dirty="0" err="1"/>
+              <a:t>analysis</a:t>
+            </a:r>
+            <a:r>
+              <a:rPr lang="pl-PL" sz="2000" dirty="0"/>
+              <a:t> </a:t>
+            </a:r>
+            <a:r>
+              <a:rPr lang="pl-PL" sz="2000" dirty="0" err="1"/>
+              <a:t>can</a:t>
+            </a:r>
+            <a:r>
+              <a:rPr lang="pl-PL" sz="2000" dirty="0"/>
+              <a:t> stop </a:t>
+            </a:r>
+            <a:r>
+              <a:rPr lang="pl-PL" sz="2000" dirty="0" err="1"/>
+              <a:t>when</a:t>
+            </a:r>
+            <a:r>
+              <a:rPr lang="pl-PL" sz="2000" dirty="0"/>
+              <a:t> the </a:t>
+            </a:r>
+            <a:r>
+              <a:rPr lang="pl-PL" sz="2000" dirty="0" err="1"/>
+              <a:t>presence</a:t>
+            </a:r>
+            <a:r>
+              <a:rPr lang="pl-PL" sz="2000" dirty="0"/>
+              <a:t> of </a:t>
+            </a:r>
+            <a:r>
+              <a:rPr lang="pl-PL" sz="2000" dirty="0" err="1"/>
+              <a:t>at</a:t>
+            </a:r>
+            <a:r>
+              <a:rPr lang="pl-PL" sz="2000" dirty="0"/>
+              <a:t> </a:t>
+            </a:r>
+            <a:r>
+              <a:rPr lang="pl-PL" sz="2000" dirty="0" err="1"/>
+              <a:t>least</a:t>
+            </a:r>
+            <a:r>
+              <a:rPr lang="pl-PL" sz="2000" dirty="0"/>
+              <a:t> one component of </a:t>
+            </a:r>
+            <a:r>
+              <a:rPr lang="pl-PL" sz="2000" dirty="0" err="1"/>
+              <a:t>interest</a:t>
+            </a:r>
+            <a:r>
+              <a:rPr lang="pl-PL" sz="2000" dirty="0"/>
+              <a:t> </a:t>
+            </a:r>
+            <a:r>
+              <a:rPr lang="pl-PL" sz="2000" dirty="0" err="1"/>
+              <a:t>is</a:t>
+            </a:r>
+            <a:r>
+              <a:rPr lang="pl-PL" sz="2000" dirty="0"/>
+              <a:t> </a:t>
+            </a:r>
+            <a:r>
+              <a:rPr lang="pl-PL" sz="2000" dirty="0" err="1"/>
+              <a:t>confirmed</a:t>
+            </a:r>
+            <a:r>
+              <a:rPr lang="pl-PL" sz="2000" dirty="0"/>
+              <a:t> and </a:t>
+            </a:r>
+            <a:r>
+              <a:rPr lang="pl-PL" sz="2000" dirty="0" err="1"/>
+              <a:t>visualized</a:t>
+            </a:r>
+            <a:r>
+              <a:rPr lang="pl-PL" sz="2000" dirty="0"/>
+              <a:t>. The </a:t>
+            </a:r>
+            <a:r>
+              <a:rPr lang="pl-PL" sz="2000" dirty="0" err="1"/>
+              <a:t>two</a:t>
+            </a:r>
+            <a:r>
+              <a:rPr lang="pl-PL" sz="2000" dirty="0"/>
+              <a:t> </a:t>
+            </a:r>
+            <a:r>
+              <a:rPr lang="pl-PL" sz="2000" dirty="0" err="1"/>
+              <a:t>components</a:t>
+            </a:r>
+            <a:r>
+              <a:rPr lang="pl-PL" sz="2000" dirty="0"/>
+              <a:t> </a:t>
+            </a:r>
+            <a:r>
+              <a:rPr lang="pl-PL" sz="2000" dirty="0" err="1"/>
+              <a:t>can</a:t>
+            </a:r>
+            <a:r>
+              <a:rPr lang="pl-PL" sz="2000" dirty="0"/>
+              <a:t> be </a:t>
+            </a:r>
+            <a:r>
+              <a:rPr lang="pl-PL" sz="2000" dirty="0" err="1"/>
+              <a:t>identified</a:t>
+            </a:r>
+            <a:r>
+              <a:rPr lang="pl-PL" sz="2000" dirty="0"/>
+              <a:t> </a:t>
+            </a:r>
+            <a:r>
+              <a:rPr lang="pl-PL" sz="2000" dirty="0" err="1"/>
+              <a:t>separately</a:t>
+            </a:r>
+            <a:r>
+              <a:rPr lang="pl-PL" sz="2000" dirty="0"/>
+              <a:t> </a:t>
+            </a:r>
+            <a:r>
+              <a:rPr lang="pl-PL" sz="2000" dirty="0" err="1"/>
+              <a:t>or</a:t>
+            </a:r>
+            <a:r>
+              <a:rPr lang="pl-PL" sz="2000" dirty="0"/>
+              <a:t> </a:t>
+            </a:r>
+            <a:r>
+              <a:rPr lang="pl-PL" sz="2000" dirty="0" err="1"/>
+              <a:t>together</a:t>
+            </a:r>
+            <a:r>
+              <a:rPr lang="pl-PL" sz="2000" dirty="0"/>
+              <a:t> in one </a:t>
+            </a:r>
+            <a:r>
+              <a:rPr lang="pl-PL" sz="2000" dirty="0" err="1"/>
+              <a:t>result</a:t>
+            </a:r>
+            <a:r>
+              <a:rPr lang="pl-PL" sz="2000" dirty="0"/>
+              <a:t>. The </a:t>
+            </a:r>
+            <a:r>
+              <a:rPr lang="pl-PL" sz="2000" dirty="0" err="1"/>
+              <a:t>key</a:t>
+            </a:r>
+            <a:r>
+              <a:rPr lang="pl-PL" sz="2000" dirty="0"/>
+              <a:t> </a:t>
+            </a:r>
+            <a:r>
+              <a:rPr lang="pl-PL" sz="2000" dirty="0" err="1"/>
+              <a:t>is</a:t>
+            </a:r>
+            <a:r>
+              <a:rPr lang="pl-PL" sz="2000" dirty="0"/>
+              <a:t> to </a:t>
+            </a:r>
+            <a:r>
+              <a:rPr lang="pl-PL" sz="2000" dirty="0" err="1"/>
+              <a:t>separate</a:t>
+            </a:r>
+            <a:r>
+              <a:rPr lang="pl-PL" sz="2000" dirty="0"/>
+              <a:t> </a:t>
+            </a:r>
+            <a:r>
+              <a:rPr lang="pl-PL" sz="2000" dirty="0" err="1"/>
+              <a:t>them</a:t>
+            </a:r>
+            <a:r>
+              <a:rPr lang="pl-PL" sz="2000" dirty="0"/>
+              <a:t> from </a:t>
+            </a:r>
+            <a:r>
+              <a:rPr lang="pl-PL" sz="2000" dirty="0" err="1"/>
+              <a:t>each</a:t>
+            </a:r>
+            <a:r>
+              <a:rPr lang="pl-PL" sz="2000" dirty="0"/>
+              <a:t> </a:t>
+            </a:r>
+            <a:r>
+              <a:rPr lang="pl-PL" sz="2000" dirty="0" err="1"/>
+              <a:t>other,even</a:t>
+            </a:r>
+            <a:r>
+              <a:rPr lang="pl-PL" sz="2000" dirty="0"/>
+              <a:t> </a:t>
+            </a:r>
+            <a:r>
+              <a:rPr lang="pl-PL" sz="2000" dirty="0" err="1"/>
+              <a:t>if</a:t>
+            </a:r>
+            <a:r>
+              <a:rPr lang="pl-PL" sz="2000" dirty="0"/>
+              <a:t> </a:t>
+            </a:r>
+            <a:r>
+              <a:rPr lang="pl-PL" sz="2000" dirty="0" err="1"/>
+              <a:t>it</a:t>
+            </a:r>
+            <a:r>
+              <a:rPr lang="pl-PL" sz="2000" dirty="0"/>
+              <a:t> </a:t>
+            </a:r>
+            <a:r>
+              <a:rPr lang="pl-PL" sz="2000" dirty="0" err="1"/>
+              <a:t>is</a:t>
+            </a:r>
+            <a:r>
+              <a:rPr lang="pl-PL" sz="2000" dirty="0"/>
+              <a:t> </a:t>
+            </a:r>
+            <a:r>
+              <a:rPr lang="pl-PL" sz="2000" dirty="0" err="1"/>
+              <a:t>only</a:t>
+            </a:r>
+            <a:r>
+              <a:rPr lang="pl-PL" sz="2000" dirty="0"/>
+              <a:t> one of </a:t>
+            </a:r>
+            <a:r>
+              <a:rPr lang="pl-PL" sz="2000" dirty="0" err="1"/>
+              <a:t>them</a:t>
+            </a:r>
+            <a:r>
+              <a:rPr lang="pl-PL" sz="2000" dirty="0"/>
+              <a:t>.</a:t>
+            </a:r>
+          </a:p>
+          <a:p>
+            <a:pPr marL="0" indent="0">
+              <a:buNone/>
+            </a:pPr>
+            <a:endParaRPr lang="pl-PL" sz="2000" dirty="0"/>
+          </a:p>
+          <a:p>
+            <a:pPr marL="0" indent="0">
+              <a:buNone/>
+            </a:pPr>
+            <a:r>
+              <a:rPr lang="pl-PL" sz="2000" dirty="0"/>
+              <a:t>The data </a:t>
+            </a:r>
+            <a:r>
+              <a:rPr lang="pl-PL" sz="2000" dirty="0" err="1"/>
+              <a:t>is</a:t>
+            </a:r>
+            <a:r>
+              <a:rPr lang="pl-PL" sz="2000" dirty="0"/>
+              <a:t> a </a:t>
+            </a:r>
+            <a:r>
+              <a:rPr lang="pl-PL" sz="2000" dirty="0" err="1"/>
+              <a:t>vibration</a:t>
+            </a:r>
+            <a:r>
+              <a:rPr lang="pl-PL" sz="2000" dirty="0"/>
+              <a:t> </a:t>
+            </a:r>
+            <a:r>
+              <a:rPr lang="pl-PL" sz="2000" dirty="0" err="1"/>
+              <a:t>signal</a:t>
+            </a:r>
+            <a:r>
+              <a:rPr lang="pl-PL" sz="2000" dirty="0"/>
+              <a:t> </a:t>
+            </a:r>
+            <a:r>
+              <a:rPr lang="pl-PL" sz="2000" dirty="0" err="1"/>
+              <a:t>sampled</a:t>
+            </a:r>
+            <a:r>
+              <a:rPr lang="pl-PL" sz="2000" dirty="0"/>
+              <a:t> </a:t>
+            </a:r>
+            <a:r>
+              <a:rPr lang="pl-PL" sz="2000" dirty="0" err="1"/>
+              <a:t>at</a:t>
+            </a:r>
+            <a:r>
+              <a:rPr lang="pl-PL" sz="2000" dirty="0"/>
+              <a:t> 8192 </a:t>
+            </a:r>
+            <a:r>
+              <a:rPr lang="pl-PL" sz="2000" dirty="0" err="1"/>
+              <a:t>Hz</a:t>
+            </a:r>
+            <a:r>
+              <a:rPr lang="pl-PL" sz="2000" dirty="0"/>
+              <a:t>, </a:t>
+            </a:r>
+            <a:r>
+              <a:rPr lang="pl-PL" sz="2000" dirty="0" err="1"/>
+              <a:t>measured</a:t>
+            </a:r>
+            <a:r>
+              <a:rPr lang="pl-PL" sz="2000" dirty="0"/>
+              <a:t> on the </a:t>
+            </a:r>
+            <a:r>
+              <a:rPr lang="pl-PL" sz="2000" dirty="0" err="1"/>
+              <a:t>casing</a:t>
+            </a:r>
+            <a:r>
+              <a:rPr lang="pl-PL" sz="2000" dirty="0"/>
+              <a:t> of the </a:t>
+            </a:r>
+            <a:r>
+              <a:rPr lang="pl-PL" sz="2000" dirty="0" err="1"/>
+              <a:t>industrial</a:t>
+            </a:r>
+            <a:r>
+              <a:rPr lang="pl-PL" sz="2000" dirty="0"/>
+              <a:t> </a:t>
+            </a:r>
+            <a:r>
+              <a:rPr lang="pl-PL" sz="2000" dirty="0" err="1"/>
+              <a:t>gearbox</a:t>
+            </a:r>
+            <a:r>
+              <a:rPr lang="pl-PL" sz="2000" dirty="0"/>
+              <a:t> in a </a:t>
+            </a:r>
+            <a:r>
+              <a:rPr lang="pl-PL" sz="2000" dirty="0" err="1"/>
+              <a:t>belt</a:t>
+            </a:r>
+            <a:r>
+              <a:rPr lang="pl-PL" sz="2000" dirty="0"/>
+              <a:t> </a:t>
+            </a:r>
+            <a:r>
+              <a:rPr lang="pl-PL" sz="2000" dirty="0" err="1"/>
+              <a:t>conveyor</a:t>
+            </a:r>
+            <a:r>
+              <a:rPr lang="pl-PL" sz="2000" dirty="0"/>
+              <a:t> </a:t>
+            </a:r>
+            <a:r>
+              <a:rPr lang="pl-PL" sz="2000" dirty="0" err="1"/>
+              <a:t>drive</a:t>
+            </a:r>
+            <a:r>
+              <a:rPr lang="pl-PL" sz="2000" dirty="0"/>
+              <a:t> </a:t>
+            </a:r>
+            <a:r>
+              <a:rPr lang="pl-PL" sz="2000" dirty="0" err="1"/>
+              <a:t>station</a:t>
+            </a:r>
+            <a:r>
+              <a:rPr lang="pl-PL" sz="2000" dirty="0"/>
+              <a:t>. The </a:t>
+            </a:r>
+            <a:r>
+              <a:rPr lang="pl-PL" sz="2000" dirty="0" err="1"/>
+              <a:t>theoretical</a:t>
+            </a:r>
+            <a:r>
+              <a:rPr lang="pl-PL" sz="2000" dirty="0"/>
+              <a:t> </a:t>
+            </a:r>
+            <a:r>
+              <a:rPr lang="pl-PL" sz="2000" dirty="0" err="1"/>
+              <a:t>fault</a:t>
+            </a:r>
+            <a:r>
+              <a:rPr lang="pl-PL" sz="2000" dirty="0"/>
+              <a:t> </a:t>
+            </a:r>
+            <a:r>
+              <a:rPr lang="pl-PL" sz="2000" dirty="0" err="1"/>
+              <a:t>frequencies</a:t>
+            </a:r>
+            <a:r>
+              <a:rPr lang="pl-PL" sz="2000" dirty="0"/>
+              <a:t> </a:t>
+            </a:r>
+            <a:r>
+              <a:rPr lang="pl-PL" sz="2000" dirty="0" err="1"/>
+              <a:t>are</a:t>
+            </a:r>
+            <a:r>
+              <a:rPr lang="pl-PL" sz="2000" dirty="0"/>
+              <a:t> </a:t>
+            </a:r>
+            <a:r>
+              <a:rPr lang="pl-PL" sz="2000" dirty="0" err="1"/>
+              <a:t>unknown</a:t>
+            </a:r>
+            <a:r>
+              <a:rPr lang="pl-PL" sz="2000" dirty="0"/>
+              <a:t>, </a:t>
+            </a:r>
+            <a:r>
+              <a:rPr lang="pl-PL" sz="2000" dirty="0" err="1"/>
+              <a:t>so</a:t>
+            </a:r>
+            <a:r>
+              <a:rPr lang="pl-PL" sz="2000" dirty="0"/>
+              <a:t> a </a:t>
+            </a:r>
+            <a:r>
+              <a:rPr lang="pl-PL" sz="2000" dirty="0" err="1"/>
+              <a:t>clear</a:t>
+            </a:r>
+            <a:r>
+              <a:rPr lang="pl-PL" sz="2000" dirty="0"/>
+              <a:t> </a:t>
+            </a:r>
+            <a:r>
+              <a:rPr lang="pl-PL" sz="2000" dirty="0" err="1"/>
+              <a:t>harmonic</a:t>
+            </a:r>
+            <a:r>
+              <a:rPr lang="pl-PL" sz="2000" dirty="0"/>
+              <a:t> </a:t>
+            </a:r>
+            <a:r>
+              <a:rPr lang="pl-PL" sz="2000" dirty="0" err="1"/>
+              <a:t>pattern</a:t>
+            </a:r>
+            <a:r>
+              <a:rPr lang="pl-PL" sz="2000" dirty="0"/>
+              <a:t> on </a:t>
+            </a:r>
+            <a:r>
+              <a:rPr lang="pl-PL" sz="2000" dirty="0" err="1"/>
+              <a:t>envelope</a:t>
+            </a:r>
+            <a:r>
+              <a:rPr lang="pl-PL" sz="2000" dirty="0"/>
+              <a:t> spectrum </a:t>
+            </a:r>
+            <a:r>
+              <a:rPr lang="pl-PL" sz="2000" dirty="0" err="1"/>
+              <a:t>or</a:t>
+            </a:r>
+            <a:r>
+              <a:rPr lang="pl-PL" sz="2000" dirty="0"/>
+              <a:t> </a:t>
+            </a:r>
+            <a:r>
+              <a:rPr lang="pl-PL" sz="2000" dirty="0" err="1"/>
+              <a:t>csc</a:t>
+            </a:r>
+            <a:r>
+              <a:rPr lang="pl-PL" sz="2000" dirty="0"/>
+              <a:t> map </a:t>
+            </a:r>
+            <a:r>
+              <a:rPr lang="pl-PL" sz="2000" dirty="0" err="1"/>
+              <a:t>will</a:t>
+            </a:r>
+            <a:r>
+              <a:rPr lang="pl-PL" sz="2000" dirty="0"/>
+              <a:t> be </a:t>
+            </a:r>
+            <a:r>
+              <a:rPr lang="pl-PL" sz="2000" dirty="0" err="1"/>
+              <a:t>required</a:t>
+            </a:r>
+            <a:r>
+              <a:rPr lang="pl-PL" sz="2000" dirty="0"/>
+              <a:t> to </a:t>
+            </a:r>
+            <a:r>
+              <a:rPr lang="pl-PL" sz="2000" dirty="0" err="1"/>
+              <a:t>identify</a:t>
+            </a:r>
+            <a:r>
+              <a:rPr lang="pl-PL" sz="2000" dirty="0"/>
+              <a:t> </a:t>
+            </a:r>
+            <a:r>
+              <a:rPr lang="pl-PL" sz="2000" dirty="0" err="1"/>
+              <a:t>them</a:t>
+            </a:r>
+            <a:r>
+              <a:rPr lang="pl-PL" sz="2000" dirty="0"/>
+              <a:t>. The </a:t>
+            </a:r>
+            <a:r>
+              <a:rPr lang="pl-PL" sz="2000" dirty="0" err="1"/>
+              <a:t>carrier</a:t>
+            </a:r>
+            <a:r>
+              <a:rPr lang="pl-PL" sz="2000" dirty="0"/>
+              <a:t> </a:t>
+            </a:r>
+            <a:r>
+              <a:rPr lang="pl-PL" sz="2000" dirty="0" err="1"/>
+              <a:t>frequency</a:t>
+            </a:r>
+            <a:r>
+              <a:rPr lang="pl-PL" sz="2000" dirty="0"/>
+              <a:t> </a:t>
+            </a:r>
+            <a:r>
+              <a:rPr lang="pl-PL" sz="2000" dirty="0" err="1"/>
+              <a:t>bands</a:t>
+            </a:r>
+            <a:r>
+              <a:rPr lang="pl-PL" sz="2000" dirty="0"/>
+              <a:t> </a:t>
+            </a:r>
+            <a:r>
+              <a:rPr lang="pl-PL" sz="2000" dirty="0" err="1"/>
+              <a:t>occupied</a:t>
+            </a:r>
+            <a:r>
+              <a:rPr lang="pl-PL" sz="2000" dirty="0"/>
+              <a:t> by the </a:t>
+            </a:r>
+            <a:r>
+              <a:rPr lang="pl-PL" sz="2000" dirty="0" err="1"/>
+              <a:t>components</a:t>
+            </a:r>
+            <a:r>
+              <a:rPr lang="pl-PL" sz="2000" dirty="0"/>
+              <a:t> of </a:t>
+            </a:r>
+            <a:r>
+              <a:rPr lang="pl-PL" sz="2000" dirty="0" err="1"/>
+              <a:t>interest</a:t>
+            </a:r>
+            <a:r>
+              <a:rPr lang="pl-PL" sz="2000" dirty="0"/>
+              <a:t> </a:t>
+            </a:r>
+            <a:r>
+              <a:rPr lang="pl-PL" sz="2000" dirty="0" err="1"/>
+              <a:t>should</a:t>
+            </a:r>
+            <a:r>
+              <a:rPr lang="pl-PL" sz="2000" dirty="0"/>
+              <a:t> be </a:t>
+            </a:r>
+            <a:r>
+              <a:rPr lang="pl-PL" sz="2000" dirty="0" err="1"/>
+              <a:t>possible</a:t>
+            </a:r>
+            <a:r>
+              <a:rPr lang="pl-PL" sz="2000" dirty="0"/>
+              <a:t> to </a:t>
+            </a:r>
+            <a:r>
+              <a:rPr lang="pl-PL" sz="2000" dirty="0" err="1"/>
+              <a:t>observe</a:t>
+            </a:r>
+            <a:r>
+              <a:rPr lang="pl-PL" sz="2000" dirty="0"/>
+              <a:t> on </a:t>
+            </a:r>
+            <a:r>
+              <a:rPr lang="pl-PL" sz="2000" dirty="0" err="1"/>
+              <a:t>spectrogram</a:t>
+            </a:r>
+            <a:r>
+              <a:rPr lang="pl-PL" sz="2000" dirty="0"/>
+              <a:t> </a:t>
+            </a:r>
+            <a:r>
+              <a:rPr lang="pl-PL" sz="2000" dirty="0" err="1"/>
+              <a:t>or</a:t>
+            </a:r>
+            <a:r>
+              <a:rPr lang="pl-PL" sz="2000" dirty="0"/>
+              <a:t> </a:t>
+            </a:r>
+            <a:r>
+              <a:rPr lang="pl-PL" sz="2000" dirty="0" err="1"/>
+              <a:t>csc</a:t>
+            </a:r>
+            <a:r>
+              <a:rPr lang="pl-PL" sz="2000" dirty="0"/>
+              <a:t> map.</a:t>
+            </a:r>
+          </a:p>
+          <a:p>
+            <a:pPr marL="0" indent="0">
+              <a:buNone/>
+            </a:pPr>
+            <a:endParaRPr lang="pl-PL" sz="2000" dirty="0"/>
+          </a:p>
+          <a:p>
+            <a:pPr marL="0" indent="0">
+              <a:buNone/>
+            </a:pPr>
+            <a:endParaRPr lang="pl-PL" sz="2000" dirty="0"/>
+          </a:p>
+          <a:p>
+            <a:pPr marL="0" indent="0">
+              <a:buNone/>
+            </a:pPr>
+            <a:endParaRPr lang="pl-PL" sz="2000" dirty="0"/>
+          </a:p>
+          <a:p>
+            <a:pPr marL="0" indent="0">
+              <a:buNone/>
+            </a:pPr>
+            <a:endParaRPr lang="pl-PL" sz="2000" dirty="0"/>
+          </a:p>
+        </p:txBody>
+      </p:sp>
+    </p:spTree>
+    <p:extLst>
+      <p:ext uri="{BB962C8B-B14F-4D97-AF65-F5344CB8AC3E}">
+        <p14:creationId xmlns:p14="http://schemas.microsoft.com/office/powerpoint/2010/main" val="96858033"/>
+      </p:ext>
+    </p:extLst>
+  </p:cSld>
+  <p:clrMapOvr>
+    <a:masterClrMapping/>
+  </p:clrMapOvr>
+</p:sld>
+</file>
+
 <file path=ppt/slides/slide4.xml><?xml version="1.0" encoding="utf-8"?>
 <p:sld xmlns:a="http://schemas.openxmlformats.org/drawingml/2006/main" xmlns:r="http://schemas.openxmlformats.org/officeDocument/2006/relationships" xmlns:p="http://schemas.openxmlformats.org/presentationml/2006/main">
   <p:cSld>
